--- a/遥控器显示/素材/演示文稿1.pptx
+++ b/遥控器显示/素材/演示文稿1.pptx
@@ -118,7 +118,7 @@
             <a:srgbClr val="A4A3A4"/>
           </p15:clr>
         </p15:guide>
-        <p15:guide id="2" pos="3839" userDrawn="1">
+        <p15:guide id="2" pos="3840" userDrawn="1">
           <p15:clr>
             <a:srgbClr val="A4A3A4"/>
           </p15:clr>
@@ -6192,6 +6192,366 @@
           </a:p>
         </p:txBody>
       </p:sp>
+      <p:graphicFrame>
+        <p:nvGraphicFramePr>
+          <p:cNvPr id="3" name="表格 2"/>
+          <p:cNvGraphicFramePr/>
+          <p:nvPr/>
+        </p:nvGraphicFramePr>
+        <p:xfrm>
+          <a:off x="1886585" y="954405"/>
+          <a:ext cx="3180080" cy="2708910"/>
+        </p:xfrm>
+        <a:graphic>
+          <a:graphicData uri="http://schemas.openxmlformats.org/drawingml/2006/table">
+            <a:tbl>
+              <a:tblPr bandRow="1">
+                <a:tableStyleId>{5C22544A-7EE6-4342-B048-85BDC9FD1C3A}</a:tableStyleId>
+              </a:tblPr>
+              <a:tblGrid>
+                <a:gridCol w="1304544"/>
+                <a:gridCol w="1875790"/>
+              </a:tblGrid>
+              <a:tr h="451485">
+                <a:tc>
+                  <a:txBody>
+                    <a:bodyPr/>
+                    <a:p>
+                      <a:pPr>
+                        <a:buNone/>
+                      </a:pPr>
+                      <a:endParaRPr lang="en-US" altLang="zh-CN"/>
+                    </a:p>
+                  </a:txBody>
+                  <a:tcPr/>
+                </a:tc>
+                <a:tc>
+                  <a:txBody>
+                    <a:bodyPr/>
+                    <a:p>
+                      <a:pPr>
+                        <a:buNone/>
+                      </a:pPr>
+                      <a:endParaRPr lang="zh-CN" altLang="en-US"/>
+                    </a:p>
+                  </a:txBody>
+                  <a:tcPr/>
+                </a:tc>
+              </a:tr>
+              <a:tr h="451485">
+                <a:tc>
+                  <a:txBody>
+                    <a:bodyPr/>
+                    <a:p>
+                      <a:pPr>
+                        <a:buNone/>
+                      </a:pPr>
+                      <a:endParaRPr lang="en-US" altLang="zh-CN"/>
+                    </a:p>
+                  </a:txBody>
+                  <a:tcPr/>
+                </a:tc>
+                <a:tc>
+                  <a:txBody>
+                    <a:bodyPr/>
+                    <a:p>
+                      <a:pPr>
+                        <a:buNone/>
+                      </a:pPr>
+                      <a:endParaRPr lang="zh-CN" altLang="en-US"/>
+                    </a:p>
+                  </a:txBody>
+                  <a:tcPr/>
+                </a:tc>
+              </a:tr>
+              <a:tr h="451485">
+                <a:tc>
+                  <a:txBody>
+                    <a:bodyPr/>
+                    <a:p>
+                      <a:pPr>
+                        <a:buNone/>
+                      </a:pPr>
+                      <a:endParaRPr lang="en-US" altLang="zh-CN"/>
+                    </a:p>
+                  </a:txBody>
+                  <a:tcPr/>
+                </a:tc>
+                <a:tc>
+                  <a:txBody>
+                    <a:bodyPr/>
+                    <a:p>
+                      <a:pPr>
+                        <a:buNone/>
+                      </a:pPr>
+                      <a:endParaRPr lang="zh-CN" altLang="en-US"/>
+                    </a:p>
+                  </a:txBody>
+                  <a:tcPr/>
+                </a:tc>
+              </a:tr>
+              <a:tr h="451485">
+                <a:tc>
+                  <a:txBody>
+                    <a:bodyPr/>
+                    <a:p>
+                      <a:pPr>
+                        <a:buNone/>
+                      </a:pPr>
+                      <a:endParaRPr lang="zh-CN" altLang="en-US"/>
+                    </a:p>
+                  </a:txBody>
+                  <a:tcPr/>
+                </a:tc>
+                <a:tc>
+                  <a:txBody>
+                    <a:bodyPr/>
+                    <a:p>
+                      <a:pPr>
+                        <a:buNone/>
+                      </a:pPr>
+                      <a:endParaRPr lang="zh-CN" altLang="en-US"/>
+                    </a:p>
+                  </a:txBody>
+                  <a:tcPr/>
+                </a:tc>
+              </a:tr>
+              <a:tr h="451485">
+                <a:tc>
+                  <a:txBody>
+                    <a:bodyPr/>
+                    <a:p>
+                      <a:pPr>
+                        <a:buNone/>
+                      </a:pPr>
+                      <a:endParaRPr lang="zh-CN" altLang="en-US"/>
+                    </a:p>
+                  </a:txBody>
+                  <a:tcPr/>
+                </a:tc>
+                <a:tc>
+                  <a:txBody>
+                    <a:bodyPr/>
+                    <a:p>
+                      <a:pPr>
+                        <a:buNone/>
+                      </a:pPr>
+                      <a:endParaRPr lang="zh-CN" altLang="en-US"/>
+                    </a:p>
+                  </a:txBody>
+                  <a:tcPr/>
+                </a:tc>
+              </a:tr>
+              <a:tr h="451485">
+                <a:tc>
+                  <a:txBody>
+                    <a:bodyPr/>
+                    <a:p>
+                      <a:pPr>
+                        <a:buNone/>
+                      </a:pPr>
+                      <a:endParaRPr lang="zh-CN" altLang="en-US"/>
+                    </a:p>
+                  </a:txBody>
+                  <a:tcPr/>
+                </a:tc>
+                <a:tc>
+                  <a:txBody>
+                    <a:bodyPr/>
+                    <a:p>
+                      <a:pPr>
+                        <a:buNone/>
+                      </a:pPr>
+                      <a:endParaRPr lang="zh-CN" altLang="en-US"/>
+                    </a:p>
+                  </a:txBody>
+                  <a:tcPr/>
+                </a:tc>
+              </a:tr>
+            </a:tbl>
+          </a:graphicData>
+        </a:graphic>
+      </p:graphicFrame>
+      <p:graphicFrame>
+        <p:nvGraphicFramePr>
+          <p:cNvPr id="8" name="表格 7"/>
+          <p:cNvGraphicFramePr/>
+          <p:nvPr/>
+        </p:nvGraphicFramePr>
+        <p:xfrm>
+          <a:off x="7124700" y="954405"/>
+          <a:ext cx="3180334" cy="2708910"/>
+        </p:xfrm>
+        <a:graphic>
+          <a:graphicData uri="http://schemas.openxmlformats.org/drawingml/2006/table">
+            <a:tbl>
+              <a:tblPr bandRow="1">
+                <a:tableStyleId>{5C22544A-7EE6-4342-B048-85BDC9FD1C3A}</a:tableStyleId>
+              </a:tblPr>
+              <a:tblGrid>
+                <a:gridCol w="1304544"/>
+                <a:gridCol w="1875790"/>
+              </a:tblGrid>
+              <a:tr h="451485">
+                <a:tc>
+                  <a:txBody>
+                    <a:bodyPr/>
+                    <a:p>
+                      <a:pPr>
+                        <a:buNone/>
+                      </a:pPr>
+                      <a:endParaRPr lang="en-US" altLang="zh-CN"/>
+                    </a:p>
+                  </a:txBody>
+                  <a:tcPr/>
+                </a:tc>
+                <a:tc>
+                  <a:txBody>
+                    <a:bodyPr/>
+                    <a:p>
+                      <a:pPr>
+                        <a:buNone/>
+                      </a:pPr>
+                      <a:endParaRPr lang="zh-CN" altLang="en-US"/>
+                    </a:p>
+                  </a:txBody>
+                  <a:tcPr/>
+                </a:tc>
+              </a:tr>
+              <a:tr h="451485">
+                <a:tc>
+                  <a:txBody>
+                    <a:bodyPr/>
+                    <a:p>
+                      <a:pPr>
+                        <a:buNone/>
+                      </a:pPr>
+                      <a:endParaRPr lang="en-US" altLang="zh-CN"/>
+                    </a:p>
+                  </a:txBody>
+                  <a:tcPr/>
+                </a:tc>
+                <a:tc>
+                  <a:txBody>
+                    <a:bodyPr/>
+                    <a:p>
+                      <a:pPr>
+                        <a:buNone/>
+                      </a:pPr>
+                      <a:endParaRPr lang="zh-CN" altLang="en-US"/>
+                    </a:p>
+                  </a:txBody>
+                  <a:tcPr/>
+                </a:tc>
+              </a:tr>
+              <a:tr h="451485">
+                <a:tc>
+                  <a:txBody>
+                    <a:bodyPr/>
+                    <a:p>
+                      <a:pPr>
+                        <a:buNone/>
+                      </a:pPr>
+                      <a:endParaRPr lang="en-US" altLang="zh-CN"/>
+                    </a:p>
+                  </a:txBody>
+                  <a:tcPr/>
+                </a:tc>
+                <a:tc>
+                  <a:txBody>
+                    <a:bodyPr/>
+                    <a:p>
+                      <a:pPr>
+                        <a:buNone/>
+                      </a:pPr>
+                      <a:endParaRPr lang="zh-CN" altLang="en-US"/>
+                    </a:p>
+                  </a:txBody>
+                  <a:tcPr/>
+                </a:tc>
+              </a:tr>
+              <a:tr h="451485">
+                <a:tc>
+                  <a:txBody>
+                    <a:bodyPr/>
+                    <a:p>
+                      <a:pPr>
+                        <a:buNone/>
+                      </a:pPr>
+                      <a:endParaRPr lang="zh-CN" altLang="en-US"/>
+                    </a:p>
+                  </a:txBody>
+                  <a:tcPr/>
+                </a:tc>
+                <a:tc>
+                  <a:txBody>
+                    <a:bodyPr/>
+                    <a:p>
+                      <a:pPr>
+                        <a:buNone/>
+                      </a:pPr>
+                      <a:endParaRPr lang="zh-CN" altLang="en-US"/>
+                    </a:p>
+                  </a:txBody>
+                  <a:tcPr/>
+                </a:tc>
+              </a:tr>
+              <a:tr h="451485">
+                <a:tc>
+                  <a:txBody>
+                    <a:bodyPr/>
+                    <a:p>
+                      <a:pPr>
+                        <a:buNone/>
+                      </a:pPr>
+                      <a:endParaRPr lang="zh-CN" altLang="en-US"/>
+                    </a:p>
+                  </a:txBody>
+                  <a:tcPr/>
+                </a:tc>
+                <a:tc>
+                  <a:txBody>
+                    <a:bodyPr/>
+                    <a:p>
+                      <a:pPr>
+                        <a:buNone/>
+                      </a:pPr>
+                      <a:endParaRPr lang="zh-CN" altLang="en-US"/>
+                    </a:p>
+                  </a:txBody>
+                  <a:tcPr/>
+                </a:tc>
+              </a:tr>
+              <a:tr h="451485">
+                <a:tc>
+                  <a:txBody>
+                    <a:bodyPr/>
+                    <a:p>
+                      <a:pPr>
+                        <a:buNone/>
+                      </a:pPr>
+                      <a:endParaRPr lang="zh-CN" altLang="en-US"/>
+                    </a:p>
+                  </a:txBody>
+                  <a:tcPr/>
+                </a:tc>
+                <a:tc>
+                  <a:txBody>
+                    <a:bodyPr/>
+                    <a:p>
+                      <a:pPr>
+                        <a:buNone/>
+                      </a:pPr>
+                      <a:endParaRPr lang="zh-CN" altLang="en-US"/>
+                    </a:p>
+                  </a:txBody>
+                  <a:tcPr/>
+                </a:tc>
+              </a:tr>
+            </a:tbl>
+          </a:graphicData>
+        </a:graphic>
+      </p:graphicFrame>
     </p:spTree>
     <p:custDataLst>
       <p:tags r:id="rId1"/>
